--- a/marketing/decks/phase-05-5-skills-registry.pptx
+++ b/marketing/decks/phase-05-5-skills-registry.pptx
@@ -2,24 +2,24 @@
 <file path=ppt/presentation.xml><?xml version="1.0" encoding="utf-8"?>
 <p:presentation xmlns:p="http://schemas.openxmlformats.org/presentationml/2006/main">
   <p:sldMasterIdLst>
-    <p:sldMasterId xmlns:r="http://schemas.openxmlformats.org/officeDocument/2006/relationships" id="2147483648" r:id="Rc252a01b198a4bd8"/>
+    <p:sldMasterId xmlns:r="http://schemas.openxmlformats.org/officeDocument/2006/relationships" id="2147483648" r:id="Rb84bf8bbe6424dd0"/>
   </p:sldMasterIdLst>
   <p:notesMasterIdLst>
-    <p:notesMasterId xmlns:r="http://schemas.openxmlformats.org/officeDocument/2006/relationships" r:id="Rc24815a2bf8045b3"/>
+    <p:notesMasterId xmlns:r="http://schemas.openxmlformats.org/officeDocument/2006/relationships" r:id="Rb34436a15fa8430e"/>
   </p:notesMasterIdLst>
   <p:sldIdLst>
-    <p:sldId xmlns:r="http://schemas.openxmlformats.org/officeDocument/2006/relationships" id="256" r:id="R8deda108e9ff455c"/>
-    <p:sldId xmlns:r="http://schemas.openxmlformats.org/officeDocument/2006/relationships" id="257" r:id="R004257185a2e4b37"/>
-    <p:sldId xmlns:r="http://schemas.openxmlformats.org/officeDocument/2006/relationships" id="258" r:id="R15148eec78b84b99"/>
-    <p:sldId xmlns:r="http://schemas.openxmlformats.org/officeDocument/2006/relationships" id="259" r:id="R049cd73f08f5465b"/>
-    <p:sldId xmlns:r="http://schemas.openxmlformats.org/officeDocument/2006/relationships" id="260" r:id="Ref92b437bf954e15"/>
-    <p:sldId xmlns:r="http://schemas.openxmlformats.org/officeDocument/2006/relationships" id="261" r:id="R4dcf6638c5364a23"/>
-    <p:sldId xmlns:r="http://schemas.openxmlformats.org/officeDocument/2006/relationships" id="262" r:id="R0591bfd10ad94a6a"/>
-    <p:sldId xmlns:r="http://schemas.openxmlformats.org/officeDocument/2006/relationships" id="263" r:id="Rea7ae978e27c46bd"/>
-    <p:sldId xmlns:r="http://schemas.openxmlformats.org/officeDocument/2006/relationships" id="264" r:id="Rafd497333e834464"/>
-    <p:sldId xmlns:r="http://schemas.openxmlformats.org/officeDocument/2006/relationships" id="265" r:id="R3831aa411cb44463"/>
-    <p:sldId xmlns:r="http://schemas.openxmlformats.org/officeDocument/2006/relationships" id="266" r:id="R67d3ed70fe784174"/>
-    <p:sldId xmlns:r="http://schemas.openxmlformats.org/officeDocument/2006/relationships" id="267" r:id="R6430056a9a134d0c"/>
+    <p:sldId xmlns:r="http://schemas.openxmlformats.org/officeDocument/2006/relationships" id="256" r:id="R9f6f4f4a542e4fb2"/>
+    <p:sldId xmlns:r="http://schemas.openxmlformats.org/officeDocument/2006/relationships" id="257" r:id="Rc760d542b8364f4b"/>
+    <p:sldId xmlns:r="http://schemas.openxmlformats.org/officeDocument/2006/relationships" id="258" r:id="R056e22e5196a46dc"/>
+    <p:sldId xmlns:r="http://schemas.openxmlformats.org/officeDocument/2006/relationships" id="259" r:id="R6709ed49509546a8"/>
+    <p:sldId xmlns:r="http://schemas.openxmlformats.org/officeDocument/2006/relationships" id="260" r:id="R30a019e8c6674b7c"/>
+    <p:sldId xmlns:r="http://schemas.openxmlformats.org/officeDocument/2006/relationships" id="261" r:id="R15981a19f2184389"/>
+    <p:sldId xmlns:r="http://schemas.openxmlformats.org/officeDocument/2006/relationships" id="262" r:id="R0e1f4aa6c99d4831"/>
+    <p:sldId xmlns:r="http://schemas.openxmlformats.org/officeDocument/2006/relationships" id="263" r:id="Re0ef964195b14366"/>
+    <p:sldId xmlns:r="http://schemas.openxmlformats.org/officeDocument/2006/relationships" id="264" r:id="R9b8dcac30bd34efb"/>
+    <p:sldId xmlns:r="http://schemas.openxmlformats.org/officeDocument/2006/relationships" id="265" r:id="Rcd03f486ffad4259"/>
+    <p:sldId xmlns:r="http://schemas.openxmlformats.org/officeDocument/2006/relationships" id="266" r:id="R146ad9d1808b4e77"/>
+    <p:sldId xmlns:r="http://schemas.openxmlformats.org/officeDocument/2006/relationships" id="267" r:id="Raae4474acae740f4"/>
   </p:sldIdLst>
   <p:sldSz cx="12192000" cy="6858000"/>
   <p:notesSz cx="6858000" cy="9144000"/>
@@ -476,7 +476,7 @@
           <a:lstStyle xmlns:a="http://schemas.openxmlformats.org/drawingml/2006/main"/>
           <a:p xmlns:a="http://schemas.openxmlformats.org/drawingml/2006/main">
             <a:r>
-              <a:t>Teach from docs/phases/05.5 and the skills-program handbook.\n\n[Sources]\n- marketing/lesson-plans/phase-05.5.md\n[/Sources]</a:t>
+              <a:t>Teach from docs/phases/05.5 and docs/ai-program.\n\n[Sources]\n- marketing/lesson-plans/phase-05.5.md\n[/Sources]</a:t>
             </a:r>
           </a:p>
         </p:txBody>
@@ -546,7 +546,7 @@
           <a:lstStyle xmlns:a="http://schemas.openxmlformats.org/drawingml/2006/main"/>
           <a:p xmlns:a="http://schemas.openxmlformats.org/drawingml/2006/main">
             <a:r>
-              <a:t>Teach from docs/phases/05.5 and the skills-program handbook.\n\n[Sources]\n- marketing/lesson-plans/phase-05.5.md\n[/Sources]</a:t>
+              <a:t>Teach from docs/phases/05.5 and docs/ai-program.\n\n[Sources]\n- marketing/lesson-plans/phase-05.5.md\n[/Sources]</a:t>
             </a:r>
           </a:p>
         </p:txBody>
@@ -616,7 +616,7 @@
           <a:lstStyle xmlns:a="http://schemas.openxmlformats.org/drawingml/2006/main"/>
           <a:p xmlns:a="http://schemas.openxmlformats.org/drawingml/2006/main">
             <a:r>
-              <a:t>Teach from docs/phases/05.5 and the skills-program handbook.\n\n[Sources]\n- marketing/lesson-plans/phase-05.5.md\n[/Sources]</a:t>
+              <a:t>Teach from docs/phases/05.5 and docs/ai-program.\n\n[Sources]\n- marketing/lesson-plans/phase-05.5.md\n[/Sources]</a:t>
             </a:r>
           </a:p>
         </p:txBody>
@@ -686,7 +686,7 @@
           <a:lstStyle xmlns:a="http://schemas.openxmlformats.org/drawingml/2006/main"/>
           <a:p xmlns:a="http://schemas.openxmlformats.org/drawingml/2006/main">
             <a:r>
-              <a:t>Teach from docs/phases/05.5 and the skills-program handbook.\n\n[Sources]\n- marketing/lesson-plans/phase-05.5.md\n[/Sources]</a:t>
+              <a:t>Teach from docs/phases/05.5 and docs/ai-program.\n\n[Sources]\n- marketing/lesson-plans/phase-05.5.md\n[/Sources]</a:t>
             </a:r>
           </a:p>
         </p:txBody>
@@ -756,7 +756,7 @@
           <a:lstStyle xmlns:a="http://schemas.openxmlformats.org/drawingml/2006/main"/>
           <a:p xmlns:a="http://schemas.openxmlformats.org/drawingml/2006/main">
             <a:r>
-              <a:t>Teach from docs/phases/05.5 and the skills-program handbook.\n\n[Sources]\n- marketing/lesson-plans/phase-05.5.md\n[/Sources]</a:t>
+              <a:t>Teach from docs/phases/05.5 and docs/ai-program.\n\n[Sources]\n- marketing/lesson-plans/phase-05.5.md\n[/Sources]</a:t>
             </a:r>
           </a:p>
         </p:txBody>
@@ -826,7 +826,7 @@
           <a:lstStyle xmlns:a="http://schemas.openxmlformats.org/drawingml/2006/main"/>
           <a:p xmlns:a="http://schemas.openxmlformats.org/drawingml/2006/main">
             <a:r>
-              <a:t>Teach from docs/phases/05.5 and the skills-program handbook.\n\n[Sources]\n- marketing/lesson-plans/phase-05.5.md\n[/Sources]</a:t>
+              <a:t>Teach from docs/phases/05.5 and docs/ai-program.\n\n[Sources]\n- marketing/lesson-plans/phase-05.5.md\n[/Sources]</a:t>
             </a:r>
           </a:p>
         </p:txBody>
@@ -896,7 +896,7 @@
           <a:lstStyle xmlns:a="http://schemas.openxmlformats.org/drawingml/2006/main"/>
           <a:p xmlns:a="http://schemas.openxmlformats.org/drawingml/2006/main">
             <a:r>
-              <a:t>Teach from docs/phases/05.5 and the skills-program handbook.\n\n[Sources]\n- marketing/lesson-plans/phase-05.5.md\n[/Sources]</a:t>
+              <a:t>Teach from docs/phases/05.5 and docs/ai-program.\n\n[Sources]\n- marketing/lesson-plans/phase-05.5.md\n[/Sources]</a:t>
             </a:r>
           </a:p>
         </p:txBody>
@@ -966,7 +966,7 @@
           <a:lstStyle xmlns:a="http://schemas.openxmlformats.org/drawingml/2006/main"/>
           <a:p xmlns:a="http://schemas.openxmlformats.org/drawingml/2006/main">
             <a:r>
-              <a:t>Teach from docs/phases/05.5 and the skills-program handbook.\n\n[Sources]\n- marketing/lesson-plans/phase-05.5.md\n[/Sources]</a:t>
+              <a:t>Teach from docs/phases/05.5 and docs/ai-program.\n\n[Sources]\n- marketing/lesson-plans/phase-05.5.md\n[/Sources]</a:t>
             </a:r>
           </a:p>
         </p:txBody>
@@ -1036,7 +1036,7 @@
           <a:lstStyle xmlns:a="http://schemas.openxmlformats.org/drawingml/2006/main"/>
           <a:p xmlns:a="http://schemas.openxmlformats.org/drawingml/2006/main">
             <a:r>
-              <a:t>Teach from docs/phases/05.5 and the skills-program handbook.\n\n[Sources]\n- marketing/lesson-plans/phase-05.5.md\n[/Sources]</a:t>
+              <a:t>Teach from docs/phases/05.5 and docs/ai-program.\n\n[Sources]\n- marketing/lesson-plans/phase-05.5.md\n[/Sources]</a:t>
             </a:r>
           </a:p>
         </p:txBody>
@@ -1106,7 +1106,7 @@
           <a:lstStyle xmlns:a="http://schemas.openxmlformats.org/drawingml/2006/main"/>
           <a:p xmlns:a="http://schemas.openxmlformats.org/drawingml/2006/main">
             <a:r>
-              <a:t>Teach from docs/phases/05.5 and the skills-program handbook.\n\n[Sources]\n- marketing/lesson-plans/phase-05.5.md\n[/Sources]</a:t>
+              <a:t>Teach from docs/phases/05.5 and docs/ai-program.\n\n[Sources]\n- marketing/lesson-plans/phase-05.5.md\n[/Sources]</a:t>
             </a:r>
           </a:p>
         </p:txBody>
@@ -1176,7 +1176,7 @@
           <a:lstStyle xmlns:a="http://schemas.openxmlformats.org/drawingml/2006/main"/>
           <a:p xmlns:a="http://schemas.openxmlformats.org/drawingml/2006/main">
             <a:r>
-              <a:t>Teach from docs/phases/05.5 and the skills-program handbook.\n\n[Sources]\n- marketing/lesson-plans/phase-05.5.md\n[/Sources]</a:t>
+              <a:t>Teach from docs/phases/05.5 and docs/ai-program.\n\n[Sources]\n- marketing/lesson-plans/phase-05.5.md\n[/Sources]</a:t>
             </a:r>
           </a:p>
         </p:txBody>
@@ -1246,7 +1246,7 @@
           <a:lstStyle xmlns:a="http://schemas.openxmlformats.org/drawingml/2006/main"/>
           <a:p xmlns:a="http://schemas.openxmlformats.org/drawingml/2006/main">
             <a:r>
-              <a:t>Teach from docs/phases/05.5 and the skills-program handbook.\n\n[Sources]\n- marketing/lesson-plans/phase-05.5.md\n[/Sources]</a:t>
+              <a:t>Teach from docs/phases/05.5 and docs/ai-program.\n\n[Sources]\n- marketing/lesson-plans/phase-05.5.md\n[/Sources]</a:t>
             </a:r>
           </a:p>
         </p:txBody>
@@ -4202,17 +4202,17 @@
   </p:cSld>
   <p:clrMap bg1="lt1" tx1="dk1" bg2="lt2" tx2="dk2" accent1="accent1" accent2="accent2" accent3="accent3" accent4="accent4" accent5="accent5" accent6="accent6" hlink="hlink" folHlink="folHlink"/>
   <p:sldLayoutIdLst>
-    <p:sldLayoutId xmlns:r="http://schemas.openxmlformats.org/officeDocument/2006/relationships" id="2147483649" r:id="Rea3665e7624b4f22"/>
-    <p:sldLayoutId xmlns:r="http://schemas.openxmlformats.org/officeDocument/2006/relationships" id="2147483650" r:id="R2bf536d0cb7e451a"/>
-    <p:sldLayoutId xmlns:r="http://schemas.openxmlformats.org/officeDocument/2006/relationships" id="2147483651" r:id="R51f8c29a21c74d80"/>
-    <p:sldLayoutId xmlns:r="http://schemas.openxmlformats.org/officeDocument/2006/relationships" id="2147483652" r:id="Rbcd4e303b86848a8"/>
-    <p:sldLayoutId xmlns:r="http://schemas.openxmlformats.org/officeDocument/2006/relationships" id="2147483653" r:id="Rcf8d85a494604b00"/>
-    <p:sldLayoutId xmlns:r="http://schemas.openxmlformats.org/officeDocument/2006/relationships" id="2147483654" r:id="Rc0faf87cfd2c445b"/>
-    <p:sldLayoutId xmlns:r="http://schemas.openxmlformats.org/officeDocument/2006/relationships" id="2147483655" r:id="Rbb8c0db0c7fc4202"/>
-    <p:sldLayoutId xmlns:r="http://schemas.openxmlformats.org/officeDocument/2006/relationships" id="2147483656" r:id="R5a60c5e1b3fb4e17"/>
-    <p:sldLayoutId xmlns:r="http://schemas.openxmlformats.org/officeDocument/2006/relationships" id="2147483657" r:id="Rfd690d1bfba44338"/>
-    <p:sldLayoutId xmlns:r="http://schemas.openxmlformats.org/officeDocument/2006/relationships" id="2147483658" r:id="Rba1a46c4de054d8e"/>
-    <p:sldLayoutId xmlns:r="http://schemas.openxmlformats.org/officeDocument/2006/relationships" id="2147483659" r:id="R5bd20776ac364736"/>
+    <p:sldLayoutId xmlns:r="http://schemas.openxmlformats.org/officeDocument/2006/relationships" id="2147483649" r:id="Ra8d44a7b46754774"/>
+    <p:sldLayoutId xmlns:r="http://schemas.openxmlformats.org/officeDocument/2006/relationships" id="2147483650" r:id="R76ca7ce0fb4c4947"/>
+    <p:sldLayoutId xmlns:r="http://schemas.openxmlformats.org/officeDocument/2006/relationships" id="2147483651" r:id="Rabf21db7b9c44068"/>
+    <p:sldLayoutId xmlns:r="http://schemas.openxmlformats.org/officeDocument/2006/relationships" id="2147483652" r:id="R5b2fe6a4ba6640ea"/>
+    <p:sldLayoutId xmlns:r="http://schemas.openxmlformats.org/officeDocument/2006/relationships" id="2147483653" r:id="Rde27714d443c46f4"/>
+    <p:sldLayoutId xmlns:r="http://schemas.openxmlformats.org/officeDocument/2006/relationships" id="2147483654" r:id="Rfe9b867b527f473f"/>
+    <p:sldLayoutId xmlns:r="http://schemas.openxmlformats.org/officeDocument/2006/relationships" id="2147483655" r:id="Rbe6f0718ed194513"/>
+    <p:sldLayoutId xmlns:r="http://schemas.openxmlformats.org/officeDocument/2006/relationships" id="2147483656" r:id="R67a2cd5895b540c5"/>
+    <p:sldLayoutId xmlns:r="http://schemas.openxmlformats.org/officeDocument/2006/relationships" id="2147483657" r:id="R94cec887973d48de"/>
+    <p:sldLayoutId xmlns:r="http://schemas.openxmlformats.org/officeDocument/2006/relationships" id="2147483658" r:id="R12c8086c56a04acc"/>
+    <p:sldLayoutId xmlns:r="http://schemas.openxmlformats.org/officeDocument/2006/relationships" id="2147483659" r:id="R206527c3e8da4852"/>
   </p:sldLayoutIdLst>
   <p:txStyles>
     <p:titleStyle>
@@ -4889,7 +4889,7 @@
                 <a:ea typeface="Calibri"/>
                 <a:cs typeface="Calibri"/>
               </a:rPr>
-              <a:t>Phase 05.5 second coding effort</a:t>
+              <a:t>Phase 05.5 capability registry</a:t>
             </a:r>
           </a:p>
         </p:txBody>
@@ -4979,7 +4979,7 @@
                 <a:ea typeface="Calibri"/>
                 <a:cs typeface="Calibri"/>
               </a:rPr>
-              <a:t>The browser found skills. The registry governs their organizational life.</a:t>
+              <a:t>The locator found capabilities. The registry governs their organizational life.</a:t>
             </a:r>
           </a:p>
         </p:txBody>
@@ -5377,7 +5377,7 @@
                 <a:ea typeface="Calibri"/>
                 <a:cs typeface="Calibri"/>
               </a:rPr>
-              <a:t>approve + publish PR</a:t>
+              <a:t>approve + canonical PR</a:t>
             </a:r>
           </a:p>
         </p:txBody>
@@ -7147,7 +7147,7 @@
                 <a:ea typeface="Calibri Light"/>
                 <a:cs typeface="Calibri Light"/>
               </a:rPr>
-              <a:t>The second build changes the product contract</a:t>
+              <a:t>The existing build changes the product contract</a:t>
             </a:r>
           </a:p>
         </p:txBody>
@@ -7821,7 +7821,7 @@
                 <a:ea typeface="Calibri"/>
                 <a:cs typeface="Calibri"/>
               </a:rPr>
-              <a:t>policy + installations</a:t>
+              <a:t>policy + projections</a:t>
             </a:r>
           </a:p>
         </p:txBody>
@@ -9582,7 +9582,7 @@
                 <a:ea typeface="Calibri"/>
                 <a:cs typeface="Calibri"/>
               </a:rPr>
-              <a:t>project skill files</a:t>
+              <a:t>canonical ai/ source</a:t>
             </a:r>
           </a:p>
         </p:txBody>
@@ -10035,7 +10035,7 @@
                 <a:ea typeface="Calibri"/>
                 <a:cs typeface="Calibri"/>
               </a:rPr>
-              <a:t>skill + revision</a:t>
+              <a:t>capability + revision</a:t>
             </a:r>
           </a:p>
         </p:txBody>
@@ -10223,7 +10223,7 @@
                 <a:ea typeface="Calibri"/>
                 <a:cs typeface="Calibri"/>
               </a:rPr>
-              <a:t>installation</a:t>
+              <a:t>publication + use</a:t>
             </a:r>
           </a:p>
         </p:txBody>
@@ -11248,7 +11248,7 @@
                 <a:ea typeface="Calibri"/>
                 <a:cs typeface="Calibri"/>
               </a:rPr>
-              <a:t>installed hash</a:t>
+              <a:t>canonical hash</a:t>
             </a:r>
           </a:p>
         </p:txBody>
@@ -12899,7 +12899,7 @@
                 <a:ea typeface="Calibri"/>
                 <a:cs typeface="Calibri"/>
               </a:rPr>
-              <a:t>destination diff</a:t>
+              <a:t>native projections</a:t>
             </a:r>
           </a:p>
         </p:txBody>
@@ -13511,7 +13511,7 @@
                 <a:ea typeface="Calibri"/>
                 <a:cs typeface="Calibri"/>
               </a:rPr>
-              <a:t>installation + commit</a:t>
+              <a:t>publication + use</a:t>
             </a:r>
           </a:p>
         </p:txBody>
@@ -13768,7 +13768,7 @@
                 <a:ea typeface="Calibri"/>
                 <a:cs typeface="Calibri"/>
               </a:rPr>
-              <a:t>A skill name can stay stable while its behavior changes.</a:t>
+              <a:t>A capability name can stay stable while its behavior changes.</a:t>
             </a:r>
           </a:p>
         </p:txBody>

--- a/marketing/decks/phase-05-5-skills-registry.pptx
+++ b/marketing/decks/phase-05-5-skills-registry.pptx
@@ -2,24 +2,24 @@
 <file path=ppt/presentation.xml><?xml version="1.0" encoding="utf-8"?>
 <p:presentation xmlns:p="http://schemas.openxmlformats.org/presentationml/2006/main">
   <p:sldMasterIdLst>
-    <p:sldMasterId xmlns:r="http://schemas.openxmlformats.org/officeDocument/2006/relationships" id="2147483648" r:id="Rb84bf8bbe6424dd0"/>
+    <p:sldMasterId xmlns:r="http://schemas.openxmlformats.org/officeDocument/2006/relationships" id="2147483648" r:id="Rc190af3d698b4227"/>
   </p:sldMasterIdLst>
   <p:notesMasterIdLst>
-    <p:notesMasterId xmlns:r="http://schemas.openxmlformats.org/officeDocument/2006/relationships" r:id="Rb34436a15fa8430e"/>
+    <p:notesMasterId xmlns:r="http://schemas.openxmlformats.org/officeDocument/2006/relationships" r:id="R7aa74d8421c84ec4"/>
   </p:notesMasterIdLst>
   <p:sldIdLst>
-    <p:sldId xmlns:r="http://schemas.openxmlformats.org/officeDocument/2006/relationships" id="256" r:id="R9f6f4f4a542e4fb2"/>
-    <p:sldId xmlns:r="http://schemas.openxmlformats.org/officeDocument/2006/relationships" id="257" r:id="Rc760d542b8364f4b"/>
-    <p:sldId xmlns:r="http://schemas.openxmlformats.org/officeDocument/2006/relationships" id="258" r:id="R056e22e5196a46dc"/>
-    <p:sldId xmlns:r="http://schemas.openxmlformats.org/officeDocument/2006/relationships" id="259" r:id="R6709ed49509546a8"/>
-    <p:sldId xmlns:r="http://schemas.openxmlformats.org/officeDocument/2006/relationships" id="260" r:id="R30a019e8c6674b7c"/>
-    <p:sldId xmlns:r="http://schemas.openxmlformats.org/officeDocument/2006/relationships" id="261" r:id="R15981a19f2184389"/>
-    <p:sldId xmlns:r="http://schemas.openxmlformats.org/officeDocument/2006/relationships" id="262" r:id="R0e1f4aa6c99d4831"/>
-    <p:sldId xmlns:r="http://schemas.openxmlformats.org/officeDocument/2006/relationships" id="263" r:id="Re0ef964195b14366"/>
-    <p:sldId xmlns:r="http://schemas.openxmlformats.org/officeDocument/2006/relationships" id="264" r:id="R9b8dcac30bd34efb"/>
-    <p:sldId xmlns:r="http://schemas.openxmlformats.org/officeDocument/2006/relationships" id="265" r:id="Rcd03f486ffad4259"/>
-    <p:sldId xmlns:r="http://schemas.openxmlformats.org/officeDocument/2006/relationships" id="266" r:id="R146ad9d1808b4e77"/>
-    <p:sldId xmlns:r="http://schemas.openxmlformats.org/officeDocument/2006/relationships" id="267" r:id="Raae4474acae740f4"/>
+    <p:sldId xmlns:r="http://schemas.openxmlformats.org/officeDocument/2006/relationships" id="256" r:id="R9ace817fcbd247b7"/>
+    <p:sldId xmlns:r="http://schemas.openxmlformats.org/officeDocument/2006/relationships" id="257" r:id="Rd34247a2faa048bd"/>
+    <p:sldId xmlns:r="http://schemas.openxmlformats.org/officeDocument/2006/relationships" id="258" r:id="Rfca6dc2f235441f8"/>
+    <p:sldId xmlns:r="http://schemas.openxmlformats.org/officeDocument/2006/relationships" id="259" r:id="Rc42f1c78b6904287"/>
+    <p:sldId xmlns:r="http://schemas.openxmlformats.org/officeDocument/2006/relationships" id="260" r:id="R41b99565fa2c442c"/>
+    <p:sldId xmlns:r="http://schemas.openxmlformats.org/officeDocument/2006/relationships" id="261" r:id="R81c5fed1884e4d2d"/>
+    <p:sldId xmlns:r="http://schemas.openxmlformats.org/officeDocument/2006/relationships" id="262" r:id="R29f7766047bb45d5"/>
+    <p:sldId xmlns:r="http://schemas.openxmlformats.org/officeDocument/2006/relationships" id="263" r:id="Rab8ba8e54a6441cb"/>
+    <p:sldId xmlns:r="http://schemas.openxmlformats.org/officeDocument/2006/relationships" id="264" r:id="R8a5dfb1d14a24834"/>
+    <p:sldId xmlns:r="http://schemas.openxmlformats.org/officeDocument/2006/relationships" id="265" r:id="R92131e8236334dcf"/>
+    <p:sldId xmlns:r="http://schemas.openxmlformats.org/officeDocument/2006/relationships" id="266" r:id="Re278d5782bf94688"/>
+    <p:sldId xmlns:r="http://schemas.openxmlformats.org/officeDocument/2006/relationships" id="267" r:id="R1a9bb7d11ac14a9a"/>
   </p:sldIdLst>
   <p:sldSz cx="12192000" cy="6858000"/>
   <p:notesSz cx="6858000" cy="9144000"/>
@@ -4202,17 +4202,17 @@
   </p:cSld>
   <p:clrMap bg1="lt1" tx1="dk1" bg2="lt2" tx2="dk2" accent1="accent1" accent2="accent2" accent3="accent3" accent4="accent4" accent5="accent5" accent6="accent6" hlink="hlink" folHlink="folHlink"/>
   <p:sldLayoutIdLst>
-    <p:sldLayoutId xmlns:r="http://schemas.openxmlformats.org/officeDocument/2006/relationships" id="2147483649" r:id="Ra8d44a7b46754774"/>
-    <p:sldLayoutId xmlns:r="http://schemas.openxmlformats.org/officeDocument/2006/relationships" id="2147483650" r:id="R76ca7ce0fb4c4947"/>
-    <p:sldLayoutId xmlns:r="http://schemas.openxmlformats.org/officeDocument/2006/relationships" id="2147483651" r:id="Rabf21db7b9c44068"/>
-    <p:sldLayoutId xmlns:r="http://schemas.openxmlformats.org/officeDocument/2006/relationships" id="2147483652" r:id="R5b2fe6a4ba6640ea"/>
-    <p:sldLayoutId xmlns:r="http://schemas.openxmlformats.org/officeDocument/2006/relationships" id="2147483653" r:id="Rde27714d443c46f4"/>
-    <p:sldLayoutId xmlns:r="http://schemas.openxmlformats.org/officeDocument/2006/relationships" id="2147483654" r:id="Rfe9b867b527f473f"/>
-    <p:sldLayoutId xmlns:r="http://schemas.openxmlformats.org/officeDocument/2006/relationships" id="2147483655" r:id="Rbe6f0718ed194513"/>
-    <p:sldLayoutId xmlns:r="http://schemas.openxmlformats.org/officeDocument/2006/relationships" id="2147483656" r:id="R67a2cd5895b540c5"/>
-    <p:sldLayoutId xmlns:r="http://schemas.openxmlformats.org/officeDocument/2006/relationships" id="2147483657" r:id="R94cec887973d48de"/>
-    <p:sldLayoutId xmlns:r="http://schemas.openxmlformats.org/officeDocument/2006/relationships" id="2147483658" r:id="R12c8086c56a04acc"/>
-    <p:sldLayoutId xmlns:r="http://schemas.openxmlformats.org/officeDocument/2006/relationships" id="2147483659" r:id="R206527c3e8da4852"/>
+    <p:sldLayoutId xmlns:r="http://schemas.openxmlformats.org/officeDocument/2006/relationships" id="2147483649" r:id="Rad3f877d55bc481d"/>
+    <p:sldLayoutId xmlns:r="http://schemas.openxmlformats.org/officeDocument/2006/relationships" id="2147483650" r:id="Rf73fd24643ec4fab"/>
+    <p:sldLayoutId xmlns:r="http://schemas.openxmlformats.org/officeDocument/2006/relationships" id="2147483651" r:id="R1ed00e44de294694"/>
+    <p:sldLayoutId xmlns:r="http://schemas.openxmlformats.org/officeDocument/2006/relationships" id="2147483652" r:id="R58ac0b21f99948bc"/>
+    <p:sldLayoutId xmlns:r="http://schemas.openxmlformats.org/officeDocument/2006/relationships" id="2147483653" r:id="R54ab48f40e10477d"/>
+    <p:sldLayoutId xmlns:r="http://schemas.openxmlformats.org/officeDocument/2006/relationships" id="2147483654" r:id="R820d679ef700436e"/>
+    <p:sldLayoutId xmlns:r="http://schemas.openxmlformats.org/officeDocument/2006/relationships" id="2147483655" r:id="R483609aeaebc4e1a"/>
+    <p:sldLayoutId xmlns:r="http://schemas.openxmlformats.org/officeDocument/2006/relationships" id="2147483656" r:id="R9e0f6bea9c8a4e2b"/>
+    <p:sldLayoutId xmlns:r="http://schemas.openxmlformats.org/officeDocument/2006/relationships" id="2147483657" r:id="R02275754642d48e2"/>
+    <p:sldLayoutId xmlns:r="http://schemas.openxmlformats.org/officeDocument/2006/relationships" id="2147483658" r:id="Rd7ce816a85e44ed2"/>
+    <p:sldLayoutId xmlns:r="http://schemas.openxmlformats.org/officeDocument/2006/relationships" id="2147483659" r:id="R836e04548c7042ab"/>
   </p:sldLayoutIdLst>
   <p:txStyles>
     <p:titleStyle>
@@ -4784,10 +4784,14 @@
           <a:lstStyle xmlns:a="http://schemas.openxmlformats.org/drawingml/2006/main"/>
           <a:p xmlns:a="http://schemas.openxmlformats.org/drawingml/2006/main">
             <a:pPr algn="l">
-              <a:buNone/>
-            </a:pPr>
-            <a:r>
-              <a:rPr sz="4350" b="1">
+              <a:lnSpc>
+                <a:spcPct val="98000"/>
+              </a:lnSpc>
+              <a:buNone/>
+              <a:defRPr sz="3525" b="1"/>
+            </a:pPr>
+            <a:r>
+              <a:rPr sz="3525" b="1">
                 <a:solidFill>
                   <a:srgbClr val="000000"/>
                 </a:solidFill>
@@ -4831,10 +4835,14 @@
           <a:lstStyle xmlns:a="http://schemas.openxmlformats.org/drawingml/2006/main"/>
           <a:p xmlns:a="http://schemas.openxmlformats.org/drawingml/2006/main">
             <a:pPr algn="l">
-              <a:buNone/>
-            </a:pPr>
-            <a:r>
-              <a:rPr sz="4350" b="1">
+              <a:lnSpc>
+                <a:spcPct val="98000"/>
+              </a:lnSpc>
+              <a:buNone/>
+              <a:defRPr sz="3525" b="1"/>
+            </a:pPr>
+            <a:r>
+              <a:rPr sz="3525" b="1">
                 <a:solidFill>
                   <a:srgbClr val="000000"/>
                 </a:solidFill>
@@ -4878,10 +4886,14 @@
           <a:lstStyle xmlns:a="http://schemas.openxmlformats.org/drawingml/2006/main"/>
           <a:p xmlns:a="http://schemas.openxmlformats.org/drawingml/2006/main">
             <a:pPr algn="l">
-              <a:buNone/>
-            </a:pPr>
-            <a:r>
-              <a:rPr sz="1875" b="0">
+              <a:lnSpc>
+                <a:spcPct val="108000"/>
+              </a:lnSpc>
+              <a:buNone/>
+              <a:defRPr sz="1950" b="1"/>
+            </a:pPr>
+            <a:r>
+              <a:rPr sz="1950" b="1">
                 <a:solidFill>
                   <a:srgbClr val="60646C"/>
                 </a:solidFill>
@@ -4889,7 +4901,18 @@
                 <a:ea typeface="Calibri"/>
                 <a:cs typeface="Calibri"/>
               </a:rPr>
-              <a:t>Phase 05.5 capability registry</a:t>
+              <a:t>Phase 05 Part B</a:t>
+            </a:r>
+            <a:r>
+              <a:rPr sz="1950" b="1">
+                <a:solidFill>
+                  <a:srgbClr val="60646C"/>
+                </a:solidFill>
+                <a:latin typeface="Calibri"/>
+                <a:ea typeface="Calibri"/>
+                <a:cs typeface="Calibri"/>
+              </a:rPr>
+              <a:t> capability registry</a:t>
             </a:r>
           </a:p>
         </p:txBody>
@@ -4968,10 +4991,14 @@
           <a:lstStyle xmlns:a="http://schemas.openxmlformats.org/drawingml/2006/main"/>
           <a:p xmlns:a="http://schemas.openxmlformats.org/drawingml/2006/main">
             <a:pPr algn="l">
-              <a:buNone/>
-            </a:pPr>
-            <a:r>
-              <a:rPr sz="2175" b="0">
+              <a:lnSpc>
+                <a:spcPct val="112000"/>
+              </a:lnSpc>
+              <a:buNone/>
+              <a:defRPr sz="1350"/>
+            </a:pPr>
+            <a:r>
+              <a:rPr sz="1350" b="0">
                 <a:solidFill>
                   <a:srgbClr val="000000"/>
                 </a:solidFill>
@@ -5670,10 +5697,14 @@
           <a:lstStyle xmlns:a="http://schemas.openxmlformats.org/drawingml/2006/main"/>
           <a:p xmlns:a="http://schemas.openxmlformats.org/drawingml/2006/main">
             <a:pPr algn="l">
-              <a:buNone/>
-            </a:pPr>
-            <a:r>
-              <a:rPr sz="1125" b="1">
+              <a:lnSpc>
+                <a:spcPct val="106000"/>
+              </a:lnSpc>
+              <a:buNone/>
+              <a:defRPr sz="1050" b="1"/>
+            </a:pPr>
+            <a:r>
+              <a:rPr sz="1050" b="1">
                 <a:solidFill>
                   <a:srgbClr val="60646C"/>
                 </a:solidFill>
@@ -5681,7 +5712,7 @@
                 <a:ea typeface="Calibri"/>
                 <a:cs typeface="Calibri"/>
               </a:rPr>
-              <a:t>PHASE 05.5 REGISTRY</a:t>
+              <a:t>PHASE 05 · PART B</a:t>
             </a:r>
           </a:p>
         </p:txBody>
@@ -6789,10 +6820,14 @@
           <a:lstStyle xmlns:a="http://schemas.openxmlformats.org/drawingml/2006/main"/>
           <a:p xmlns:a="http://schemas.openxmlformats.org/drawingml/2006/main">
             <a:pPr algn="l">
-              <a:buNone/>
-            </a:pPr>
-            <a:r>
-              <a:rPr sz="4350" b="1">
+              <a:lnSpc>
+                <a:spcPct val="98000"/>
+              </a:lnSpc>
+              <a:buNone/>
+              <a:defRPr sz="3525" b="1"/>
+            </a:pPr>
+            <a:r>
+              <a:rPr sz="3525" b="1">
                 <a:solidFill>
                   <a:srgbClr val="000000"/>
                 </a:solidFill>
@@ -6836,10 +6871,14 @@
           <a:lstStyle xmlns:a="http://schemas.openxmlformats.org/drawingml/2006/main"/>
           <a:p xmlns:a="http://schemas.openxmlformats.org/drawingml/2006/main">
             <a:pPr algn="l">
-              <a:buNone/>
-            </a:pPr>
-            <a:r>
-              <a:rPr sz="4350" b="1">
+              <a:lnSpc>
+                <a:spcPct val="98000"/>
+              </a:lnSpc>
+              <a:buNone/>
+              <a:defRPr sz="3525" b="1"/>
+            </a:pPr>
+            <a:r>
+              <a:rPr sz="3525" b="1">
                 <a:solidFill>
                   <a:srgbClr val="000000"/>
                 </a:solidFill>
@@ -6883,10 +6922,14 @@
           <a:lstStyle xmlns:a="http://schemas.openxmlformats.org/drawingml/2006/main"/>
           <a:p xmlns:a="http://schemas.openxmlformats.org/drawingml/2006/main">
             <a:pPr algn="l">
-              <a:buNone/>
-            </a:pPr>
-            <a:r>
-              <a:rPr sz="1875" b="0">
+              <a:lnSpc>
+                <a:spcPct val="108000"/>
+              </a:lnSpc>
+              <a:buNone/>
+              <a:defRPr sz="1950" b="1"/>
+            </a:pPr>
+            <a:r>
+              <a:rPr sz="1950" b="1">
                 <a:solidFill>
                   <a:srgbClr val="60646C"/>
                 </a:solidFill>
@@ -6894,7 +6937,18 @@
                 <a:ea typeface="Calibri"/>
                 <a:cs typeface="Calibri"/>
               </a:rPr>
-              <a:t>Phase 05.5 closes the lifecycle</a:t>
+              <a:t>Phase 05 Part B</a:t>
+            </a:r>
+            <a:r>
+              <a:rPr sz="1950" b="1">
+                <a:solidFill>
+                  <a:srgbClr val="60646C"/>
+                </a:solidFill>
+                <a:latin typeface="Calibri"/>
+                <a:ea typeface="Calibri"/>
+                <a:cs typeface="Calibri"/>
+              </a:rPr>
+              <a:t> closes the lifecycle</a:t>
             </a:r>
           </a:p>
         </p:txBody>
@@ -6973,10 +7027,14 @@
           <a:lstStyle xmlns:a="http://schemas.openxmlformats.org/drawingml/2006/main"/>
           <a:p xmlns:a="http://schemas.openxmlformats.org/drawingml/2006/main">
             <a:pPr algn="l">
-              <a:buNone/>
-            </a:pPr>
-            <a:r>
-              <a:rPr sz="2175" b="0">
+              <a:lnSpc>
+                <a:spcPct val="112000"/>
+              </a:lnSpc>
+              <a:buNone/>
+              <a:defRPr sz="1350"/>
+            </a:pPr>
+            <a:r>
+              <a:rPr sz="1350" b="0">
                 <a:solidFill>
                   <a:srgbClr val="000000"/>
                 </a:solidFill>
@@ -7089,10 +7147,14 @@
           <a:lstStyle xmlns:a="http://schemas.openxmlformats.org/drawingml/2006/main"/>
           <a:p xmlns:a="http://schemas.openxmlformats.org/drawingml/2006/main">
             <a:pPr algn="l">
-              <a:buNone/>
-            </a:pPr>
-            <a:r>
-              <a:rPr sz="1125" b="1">
+              <a:lnSpc>
+                <a:spcPct val="106000"/>
+              </a:lnSpc>
+              <a:buNone/>
+              <a:defRPr sz="1050" b="1"/>
+            </a:pPr>
+            <a:r>
+              <a:rPr sz="1050" b="1">
                 <a:solidFill>
                   <a:srgbClr val="60646C"/>
                 </a:solidFill>
@@ -7100,7 +7162,7 @@
                 <a:ea typeface="Calibri"/>
                 <a:cs typeface="Calibri"/>
               </a:rPr>
-              <a:t>PHASE 05.5 REGISTRY</a:t>
+              <a:t>PHASE 05 · PART B</a:t>
             </a:r>
           </a:p>
         </p:txBody>
@@ -7633,7 +7695,18 @@
                 <a:ea typeface="Calibri"/>
                 <a:cs typeface="Calibri"/>
               </a:rPr>
-              <a:t>Phase 05.5 registry</a:t>
+              <a:t>Phase 05 Part B</a:t>
+            </a:r>
+            <a:r>
+              <a:rPr sz="2250" b="1">
+                <a:solidFill>
+                  <a:srgbClr val="000000"/>
+                </a:solidFill>
+                <a:latin typeface="Calibri"/>
+                <a:ea typeface="Calibri"/>
+                <a:cs typeface="Calibri"/>
+              </a:rPr>
+              <a:t> registry</a:t>
             </a:r>
           </a:p>
         </p:txBody>
@@ -8067,10 +8140,14 @@
           <a:lstStyle xmlns:a="http://schemas.openxmlformats.org/drawingml/2006/main"/>
           <a:p xmlns:a="http://schemas.openxmlformats.org/drawingml/2006/main">
             <a:pPr algn="l">
-              <a:buNone/>
-            </a:pPr>
-            <a:r>
-              <a:rPr sz="1125" b="1">
+              <a:lnSpc>
+                <a:spcPct val="106000"/>
+              </a:lnSpc>
+              <a:buNone/>
+              <a:defRPr sz="1050" b="1"/>
+            </a:pPr>
+            <a:r>
+              <a:rPr sz="1050" b="1">
                 <a:solidFill>
                   <a:srgbClr val="60646C"/>
                 </a:solidFill>
@@ -8078,7 +8155,7 @@
                 <a:ea typeface="Calibri"/>
                 <a:cs typeface="Calibri"/>
               </a:rPr>
-              <a:t>PHASE 05.5 REGISTRY</a:t>
+              <a:t>PHASE 05 · PART B</a:t>
             </a:r>
           </a:p>
         </p:txBody>
@@ -8114,10 +8191,14 @@
           <a:lstStyle xmlns:a="http://schemas.openxmlformats.org/drawingml/2006/main"/>
           <a:p xmlns:a="http://schemas.openxmlformats.org/drawingml/2006/main">
             <a:pPr algn="l">
-              <a:buNone/>
-            </a:pPr>
-            <a:r>
-              <a:rPr sz="3750" b="1">
+              <a:lnSpc>
+                <a:spcPct val="98000"/>
+              </a:lnSpc>
+              <a:buNone/>
+              <a:defRPr sz="3525" b="1"/>
+            </a:pPr>
+            <a:r>
+              <a:rPr sz="3525" b="1">
                 <a:solidFill>
                   <a:srgbClr val="000000"/>
                 </a:solidFill>
@@ -8146,7 +8227,7 @@
         </p:nvSpPr>
         <p:spPr>
           <a:xfrm xmlns:a="http://schemas.openxmlformats.org/drawingml/2006/main">
-            <a:off x="-76200" y="3314700"/>
+            <a:off x="114300" y="3314700"/>
             <a:ext cx="1981200" cy="1504950"/>
           </a:xfrm>
           <a:prstGeom xmlns:a="http://schemas.openxmlformats.org/drawingml/2006/main" prst="rect">
@@ -8201,7 +8282,7 @@
         </p:nvSpPr>
         <p:spPr>
           <a:xfrm xmlns:a="http://schemas.openxmlformats.org/drawingml/2006/main">
-            <a:off x="19050" y="3694700"/>
+            <a:off x="209550" y="3694700"/>
             <a:ext cx="1790700" cy="400050"/>
           </a:xfrm>
           <a:prstGeom xmlns:a="http://schemas.openxmlformats.org/drawingml/2006/main" prst="rect">
@@ -8216,10 +8297,14 @@
           <a:lstStyle xmlns:a="http://schemas.openxmlformats.org/drawingml/2006/main"/>
           <a:p xmlns:a="http://schemas.openxmlformats.org/drawingml/2006/main">
             <a:pPr algn="ctr">
-              <a:buNone/>
-            </a:pPr>
-            <a:r>
-              <a:rPr sz="2000" b="1">
+              <a:lnSpc>
+                <a:spcPct val="108000"/>
+              </a:lnSpc>
+              <a:buNone/>
+              <a:defRPr sz="1725" b="1"/>
+            </a:pPr>
+            <a:r>
+              <a:rPr sz="1725" b="1">
                 <a:solidFill>
                   <a:srgbClr val="000000"/>
                 </a:solidFill>
@@ -8248,7 +8333,7 @@
         </p:nvSpPr>
         <p:spPr>
           <a:xfrm xmlns:a="http://schemas.openxmlformats.org/drawingml/2006/main">
-            <a:off x="19050" y="4114800"/>
+            <a:off x="209550" y="4114800"/>
             <a:ext cx="1790700" cy="500000"/>
           </a:xfrm>
           <a:prstGeom xmlns:a="http://schemas.openxmlformats.org/drawingml/2006/main" prst="rect">
@@ -8263,7 +8348,11 @@
           <a:lstStyle xmlns:a="http://schemas.openxmlformats.org/drawingml/2006/main"/>
           <a:p xmlns:a="http://schemas.openxmlformats.org/drawingml/2006/main">
             <a:pPr algn="ctr">
-              <a:buNone/>
+              <a:lnSpc>
+                <a:spcPct val="108000"/>
+              </a:lnSpc>
+              <a:buNone/>
+              <a:defRPr sz="1350" b="0"/>
             </a:pPr>
             <a:r>
               <a:rPr sz="1350" b="0">
@@ -8420,10 +8509,14 @@
           <a:lstStyle xmlns:a="http://schemas.openxmlformats.org/drawingml/2006/main"/>
           <a:p xmlns:a="http://schemas.openxmlformats.org/drawingml/2006/main">
             <a:pPr algn="ctr">
-              <a:buNone/>
-            </a:pPr>
-            <a:r>
-              <a:rPr sz="2000" b="1">
+              <a:lnSpc>
+                <a:spcPct val="108000"/>
+              </a:lnSpc>
+              <a:buNone/>
+              <a:defRPr sz="1725" b="1"/>
+            </a:pPr>
+            <a:r>
+              <a:rPr sz="1725" b="1">
                 <a:solidFill>
                   <a:srgbClr val="000000"/>
                 </a:solidFill>
@@ -8467,7 +8560,11 @@
           <a:lstStyle xmlns:a="http://schemas.openxmlformats.org/drawingml/2006/main"/>
           <a:p xmlns:a="http://schemas.openxmlformats.org/drawingml/2006/main">
             <a:pPr algn="ctr">
-              <a:buNone/>
+              <a:lnSpc>
+                <a:spcPct val="108000"/>
+              </a:lnSpc>
+              <a:buNone/>
+              <a:defRPr sz="1350" b="0"/>
             </a:pPr>
             <a:r>
               <a:rPr sz="1350" b="0">
@@ -8624,10 +8721,14 @@
           <a:lstStyle xmlns:a="http://schemas.openxmlformats.org/drawingml/2006/main"/>
           <a:p xmlns:a="http://schemas.openxmlformats.org/drawingml/2006/main">
             <a:pPr algn="ctr">
-              <a:buNone/>
-            </a:pPr>
-            <a:r>
-              <a:rPr sz="2000" b="1">
+              <a:lnSpc>
+                <a:spcPct val="108000"/>
+              </a:lnSpc>
+              <a:buNone/>
+              <a:defRPr sz="1725" b="1"/>
+            </a:pPr>
+            <a:r>
+              <a:rPr sz="1725" b="1">
                 <a:solidFill>
                   <a:srgbClr val="000000"/>
                 </a:solidFill>
@@ -8671,7 +8772,11 @@
           <a:lstStyle xmlns:a="http://schemas.openxmlformats.org/drawingml/2006/main"/>
           <a:p xmlns:a="http://schemas.openxmlformats.org/drawingml/2006/main">
             <a:pPr algn="ctr">
-              <a:buNone/>
+              <a:lnSpc>
+                <a:spcPct val="108000"/>
+              </a:lnSpc>
+              <a:buNone/>
+              <a:defRPr sz="1350" b="0"/>
             </a:pPr>
             <a:r>
               <a:rPr sz="1350" b="0">
@@ -8828,10 +8933,14 @@
           <a:lstStyle xmlns:a="http://schemas.openxmlformats.org/drawingml/2006/main"/>
           <a:p xmlns:a="http://schemas.openxmlformats.org/drawingml/2006/main">
             <a:pPr algn="ctr">
-              <a:buNone/>
-            </a:pPr>
-            <a:r>
-              <a:rPr sz="2000" b="1">
+              <a:lnSpc>
+                <a:spcPct val="108000"/>
+              </a:lnSpc>
+              <a:buNone/>
+              <a:defRPr sz="1725" b="1"/>
+            </a:pPr>
+            <a:r>
+              <a:rPr sz="1725" b="1">
                 <a:solidFill>
                   <a:srgbClr val="000000"/>
                 </a:solidFill>
@@ -8875,7 +8984,11 @@
           <a:lstStyle xmlns:a="http://schemas.openxmlformats.org/drawingml/2006/main"/>
           <a:p xmlns:a="http://schemas.openxmlformats.org/drawingml/2006/main">
             <a:pPr algn="ctr">
-              <a:buNone/>
+              <a:lnSpc>
+                <a:spcPct val="108000"/>
+              </a:lnSpc>
+              <a:buNone/>
+              <a:defRPr sz="1350" b="0"/>
             </a:pPr>
             <a:r>
               <a:rPr sz="1350" b="0">
@@ -8962,7 +9075,7 @@
         </p:nvSpPr>
         <p:spPr>
           <a:xfrm xmlns:a="http://schemas.openxmlformats.org/drawingml/2006/main">
-            <a:off x="10287000" y="3314700"/>
+            <a:off x="10096500" y="3314700"/>
             <a:ext cx="1981200" cy="1504950"/>
           </a:xfrm>
           <a:prstGeom xmlns:a="http://schemas.openxmlformats.org/drawingml/2006/main" prst="rect">
@@ -9017,7 +9130,7 @@
         </p:nvSpPr>
         <p:spPr>
           <a:xfrm xmlns:a="http://schemas.openxmlformats.org/drawingml/2006/main">
-            <a:off x="10382250" y="3694700"/>
+            <a:off x="10191750" y="3694700"/>
             <a:ext cx="1790700" cy="400050"/>
           </a:xfrm>
           <a:prstGeom xmlns:a="http://schemas.openxmlformats.org/drawingml/2006/main" prst="rect">
@@ -9032,10 +9145,14 @@
           <a:lstStyle xmlns:a="http://schemas.openxmlformats.org/drawingml/2006/main"/>
           <a:p xmlns:a="http://schemas.openxmlformats.org/drawingml/2006/main">
             <a:pPr algn="ctr">
-              <a:buNone/>
-            </a:pPr>
-            <a:r>
-              <a:rPr sz="2000" b="1">
+              <a:lnSpc>
+                <a:spcPct val="108000"/>
+              </a:lnSpc>
+              <a:buNone/>
+              <a:defRPr sz="1725" b="1"/>
+            </a:pPr>
+            <a:r>
+              <a:rPr sz="1725" b="1">
                 <a:solidFill>
                   <a:srgbClr val="000000"/>
                 </a:solidFill>
@@ -9064,7 +9181,7 @@
         </p:nvSpPr>
         <p:spPr>
           <a:xfrm xmlns:a="http://schemas.openxmlformats.org/drawingml/2006/main">
-            <a:off x="10382250" y="4114800"/>
+            <a:off x="10191750" y="4114800"/>
             <a:ext cx="1790700" cy="500000"/>
           </a:xfrm>
           <a:prstGeom xmlns:a="http://schemas.openxmlformats.org/drawingml/2006/main" prst="rect">
@@ -9079,7 +9196,11 @@
           <a:lstStyle xmlns:a="http://schemas.openxmlformats.org/drawingml/2006/main"/>
           <a:p xmlns:a="http://schemas.openxmlformats.org/drawingml/2006/main">
             <a:pPr algn="ctr">
-              <a:buNone/>
+              <a:lnSpc>
+                <a:spcPct val="108000"/>
+              </a:lnSpc>
+              <a:buNone/>
+              <a:defRPr sz="1350" b="0"/>
             </a:pPr>
             <a:r>
               <a:rPr sz="1350" b="0">
@@ -9111,8 +9232,8 @@
         </p:nvSpPr>
         <p:spPr>
           <a:xfrm xmlns:a="http://schemas.openxmlformats.org/drawingml/2006/main">
-            <a:off x="1676400" y="5181600"/>
-            <a:ext cx="8839200" cy="600075"/>
+            <a:off x="1676400" y="5448300"/>
+            <a:ext cx="8839200" cy="457200"/>
           </a:xfrm>
           <a:prstGeom xmlns:a="http://schemas.openxmlformats.org/drawingml/2006/main" prst="rect">
             <a:avLst/>
@@ -9126,10 +9247,14 @@
           <a:lstStyle xmlns:a="http://schemas.openxmlformats.org/drawingml/2006/main"/>
           <a:p xmlns:a="http://schemas.openxmlformats.org/drawingml/2006/main">
             <a:pPr algn="ctr">
-              <a:buNone/>
-            </a:pPr>
-            <a:r>
-              <a:rPr sz="2100" b="1">
+              <a:lnSpc>
+                <a:spcPct val="105000"/>
+              </a:lnSpc>
+              <a:buNone/>
+              <a:defRPr sz="1500"/>
+            </a:pPr>
+            <a:r>
+              <a:rPr sz="1500" b="1">
                 <a:solidFill>
                   <a:srgbClr val="000000"/>
                 </a:solidFill>
@@ -9242,10 +9367,14 @@
           <a:lstStyle xmlns:a="http://schemas.openxmlformats.org/drawingml/2006/main"/>
           <a:p xmlns:a="http://schemas.openxmlformats.org/drawingml/2006/main">
             <a:pPr algn="l">
-              <a:buNone/>
-            </a:pPr>
-            <a:r>
-              <a:rPr sz="1125" b="1">
+              <a:lnSpc>
+                <a:spcPct val="106000"/>
+              </a:lnSpc>
+              <a:buNone/>
+              <a:defRPr sz="1050" b="1"/>
+            </a:pPr>
+            <a:r>
+              <a:rPr sz="1050" b="1">
                 <a:solidFill>
                   <a:srgbClr val="60646C"/>
                 </a:solidFill>
@@ -9253,7 +9382,7 @@
                 <a:ea typeface="Calibri"/>
                 <a:cs typeface="Calibri"/>
               </a:rPr>
-              <a:t>PHASE 05.5 REGISTRY</a:t>
+              <a:t>PHASE 05 · PART B</a:t>
             </a:r>
           </a:p>
         </p:txBody>
@@ -9289,10 +9418,14 @@
           <a:lstStyle xmlns:a="http://schemas.openxmlformats.org/drawingml/2006/main"/>
           <a:p xmlns:a="http://schemas.openxmlformats.org/drawingml/2006/main">
             <a:pPr algn="l">
-              <a:buNone/>
-            </a:pPr>
-            <a:r>
-              <a:rPr sz="3750" b="1">
+              <a:lnSpc>
+                <a:spcPct val="98000"/>
+              </a:lnSpc>
+              <a:buNone/>
+              <a:defRPr sz="3525" b="1"/>
+            </a:pPr>
+            <a:r>
+              <a:rPr sz="3525" b="1">
                 <a:solidFill>
                   <a:srgbClr val="000000"/>
                 </a:solidFill>
@@ -9336,10 +9469,14 @@
           <a:lstStyle xmlns:a="http://schemas.openxmlformats.org/drawingml/2006/main"/>
           <a:p xmlns:a="http://schemas.openxmlformats.org/drawingml/2006/main">
             <a:pPr algn="l">
-              <a:buNone/>
-            </a:pPr>
-            <a:r>
-              <a:rPr sz="2100" b="1">
+              <a:lnSpc>
+                <a:spcPct val="108000"/>
+              </a:lnSpc>
+              <a:buNone/>
+              <a:defRPr sz="1725" b="1"/>
+            </a:pPr>
+            <a:r>
+              <a:rPr sz="1725" b="1">
                 <a:solidFill>
                   <a:srgbClr val="000000"/>
                 </a:solidFill>
@@ -9430,10 +9567,14 @@
           <a:lstStyle xmlns:a="http://schemas.openxmlformats.org/drawingml/2006/main"/>
           <a:p xmlns:a="http://schemas.openxmlformats.org/drawingml/2006/main">
             <a:pPr algn="l">
-              <a:buNone/>
-            </a:pPr>
-            <a:r>
-              <a:rPr sz="2100" b="1">
+              <a:lnSpc>
+                <a:spcPct val="108000"/>
+              </a:lnSpc>
+              <a:buNone/>
+              <a:defRPr sz="1725" b="1"/>
+            </a:pPr>
+            <a:r>
+              <a:rPr sz="1725" b="1">
                 <a:solidFill>
                   <a:srgbClr val="000000"/>
                 </a:solidFill>
@@ -9524,10 +9665,14 @@
           <a:lstStyle xmlns:a="http://schemas.openxmlformats.org/drawingml/2006/main"/>
           <a:p xmlns:a="http://schemas.openxmlformats.org/drawingml/2006/main">
             <a:pPr algn="l">
-              <a:buNone/>
-            </a:pPr>
-            <a:r>
-              <a:rPr sz="2100" b="1">
+              <a:lnSpc>
+                <a:spcPct val="108000"/>
+              </a:lnSpc>
+              <a:buNone/>
+              <a:defRPr sz="1350" b="0"/>
+            </a:pPr>
+            <a:r>
+              <a:rPr sz="1350" b="0">
                 <a:solidFill>
                   <a:srgbClr val="000000"/>
                 </a:solidFill>
@@ -9571,10 +9716,14 @@
           <a:lstStyle xmlns:a="http://schemas.openxmlformats.org/drawingml/2006/main"/>
           <a:p xmlns:a="http://schemas.openxmlformats.org/drawingml/2006/main">
             <a:pPr algn="l">
-              <a:buNone/>
-            </a:pPr>
-            <a:r>
-              <a:rPr sz="1650" b="0">
+              <a:lnSpc>
+                <a:spcPct val="112000"/>
+              </a:lnSpc>
+              <a:buNone/>
+              <a:defRPr sz="1350"/>
+            </a:pPr>
+            <a:r>
+              <a:rPr sz="1350" b="0">
                 <a:solidFill>
                   <a:srgbClr val="60646C"/>
                 </a:solidFill>
@@ -9618,10 +9767,14 @@
           <a:lstStyle xmlns:a="http://schemas.openxmlformats.org/drawingml/2006/main"/>
           <a:p xmlns:a="http://schemas.openxmlformats.org/drawingml/2006/main">
             <a:pPr algn="l">
-              <a:buNone/>
-            </a:pPr>
-            <a:r>
-              <a:rPr sz="2100" b="1">
+              <a:lnSpc>
+                <a:spcPct val="108000"/>
+              </a:lnSpc>
+              <a:buNone/>
+              <a:defRPr sz="1350" b="0"/>
+            </a:pPr>
+            <a:r>
+              <a:rPr sz="1350" b="0">
                 <a:solidFill>
                   <a:srgbClr val="000000"/>
                 </a:solidFill>
@@ -9665,10 +9818,14 @@
           <a:lstStyle xmlns:a="http://schemas.openxmlformats.org/drawingml/2006/main"/>
           <a:p xmlns:a="http://schemas.openxmlformats.org/drawingml/2006/main">
             <a:pPr algn="l">
-              <a:buNone/>
-            </a:pPr>
-            <a:r>
-              <a:rPr sz="1650" b="0">
+              <a:lnSpc>
+                <a:spcPct val="112000"/>
+              </a:lnSpc>
+              <a:buNone/>
+              <a:defRPr sz="1350"/>
+            </a:pPr>
+            <a:r>
+              <a:rPr sz="1350" b="0">
                 <a:solidFill>
                   <a:srgbClr val="60646C"/>
                 </a:solidFill>
@@ -9781,10 +9938,14 @@
           <a:lstStyle xmlns:a="http://schemas.openxmlformats.org/drawingml/2006/main"/>
           <a:p xmlns:a="http://schemas.openxmlformats.org/drawingml/2006/main">
             <a:pPr algn="l">
-              <a:buNone/>
-            </a:pPr>
-            <a:r>
-              <a:rPr sz="1125" b="1">
+              <a:lnSpc>
+                <a:spcPct val="106000"/>
+              </a:lnSpc>
+              <a:buNone/>
+              <a:defRPr sz="1050" b="1"/>
+            </a:pPr>
+            <a:r>
+              <a:rPr sz="1050" b="1">
                 <a:solidFill>
                   <a:srgbClr val="60646C"/>
                 </a:solidFill>
@@ -9792,7 +9953,7 @@
                 <a:ea typeface="Calibri"/>
                 <a:cs typeface="Calibri"/>
               </a:rPr>
-              <a:t>PHASE 05.5 REGISTRY</a:t>
+              <a:t>PHASE 05 · PART B</a:t>
             </a:r>
           </a:p>
         </p:txBody>
@@ -10712,10 +10873,14 @@
           <a:lstStyle xmlns:a="http://schemas.openxmlformats.org/drawingml/2006/main"/>
           <a:p xmlns:a="http://schemas.openxmlformats.org/drawingml/2006/main">
             <a:pPr algn="l">
-              <a:buNone/>
-            </a:pPr>
-            <a:r>
-              <a:rPr sz="1125" b="1">
+              <a:lnSpc>
+                <a:spcPct val="106000"/>
+              </a:lnSpc>
+              <a:buNone/>
+              <a:defRPr sz="1050" b="1"/>
+            </a:pPr>
+            <a:r>
+              <a:rPr sz="1050" b="1">
                 <a:solidFill>
                   <a:srgbClr val="60646C"/>
                 </a:solidFill>
@@ -10723,7 +10888,7 @@
                 <a:ea typeface="Calibri"/>
                 <a:cs typeface="Calibri"/>
               </a:rPr>
-              <a:t>PHASE 05.5 REGISTRY</a:t>
+              <a:t>PHASE 05 · PART B</a:t>
             </a:r>
           </a:p>
         </p:txBody>
@@ -10759,10 +10924,14 @@
           <a:lstStyle xmlns:a="http://schemas.openxmlformats.org/drawingml/2006/main"/>
           <a:p xmlns:a="http://schemas.openxmlformats.org/drawingml/2006/main">
             <a:pPr algn="l">
-              <a:buNone/>
-            </a:pPr>
-            <a:r>
-              <a:rPr sz="3750" b="1">
+              <a:lnSpc>
+                <a:spcPct val="98000"/>
+              </a:lnSpc>
+              <a:buNone/>
+              <a:defRPr sz="3525" b="1"/>
+            </a:pPr>
+            <a:r>
+              <a:rPr sz="3525" b="1">
                 <a:solidFill>
                   <a:srgbClr val="000000"/>
                 </a:solidFill>
@@ -10861,10 +11030,14 @@
           <a:lstStyle xmlns:a="http://schemas.openxmlformats.org/drawingml/2006/main"/>
           <a:p xmlns:a="http://schemas.openxmlformats.org/drawingml/2006/main">
             <a:pPr algn="l">
-              <a:buNone/>
-            </a:pPr>
-            <a:r>
-              <a:rPr sz="2250" b="1">
+              <a:lnSpc>
+                <a:spcPct val="108000"/>
+              </a:lnSpc>
+              <a:buNone/>
+              <a:defRPr sz="1725" b="1"/>
+            </a:pPr>
+            <a:r>
+              <a:rPr sz="1725" b="1">
                 <a:solidFill>
                   <a:srgbClr val="000000"/>
                 </a:solidFill>
@@ -10908,10 +11081,14 @@
           <a:lstStyle xmlns:a="http://schemas.openxmlformats.org/drawingml/2006/main"/>
           <a:p xmlns:a="http://schemas.openxmlformats.org/drawingml/2006/main">
             <a:pPr algn="l">
-              <a:buNone/>
-            </a:pPr>
-            <a:r>
-              <a:rPr sz="1575" b="1">
+              <a:lnSpc>
+                <a:spcPct val="108000"/>
+              </a:lnSpc>
+              <a:buNone/>
+              <a:defRPr sz="1350" b="0"/>
+            </a:pPr>
+            <a:r>
+              <a:rPr sz="1350" b="0">
                 <a:solidFill>
                   <a:srgbClr val="3D8DFF"/>
                 </a:solidFill>
@@ -10955,10 +11132,14 @@
           <a:lstStyle xmlns:a="http://schemas.openxmlformats.org/drawingml/2006/main"/>
           <a:p xmlns:a="http://schemas.openxmlformats.org/drawingml/2006/main">
             <a:pPr algn="l">
-              <a:buNone/>
-            </a:pPr>
-            <a:r>
-              <a:rPr sz="1575" b="0">
+              <a:lnSpc>
+                <a:spcPct val="108000"/>
+              </a:lnSpc>
+              <a:buNone/>
+              <a:defRPr sz="1350" b="0"/>
+            </a:pPr>
+            <a:r>
+              <a:rPr sz="1350" b="0">
                 <a:solidFill>
                   <a:srgbClr val="000000"/>
                 </a:solidFill>
@@ -11002,10 +11183,14 @@
           <a:lstStyle xmlns:a="http://schemas.openxmlformats.org/drawingml/2006/main"/>
           <a:p xmlns:a="http://schemas.openxmlformats.org/drawingml/2006/main">
             <a:pPr algn="l">
-              <a:buNone/>
-            </a:pPr>
-            <a:r>
-              <a:rPr sz="1575" b="1">
+              <a:lnSpc>
+                <a:spcPct val="108000"/>
+              </a:lnSpc>
+              <a:buNone/>
+              <a:defRPr sz="1350" b="0"/>
+            </a:pPr>
+            <a:r>
+              <a:rPr sz="1350" b="0">
                 <a:solidFill>
                   <a:srgbClr val="3D8DFF"/>
                 </a:solidFill>
@@ -11049,10 +11234,14 @@
           <a:lstStyle xmlns:a="http://schemas.openxmlformats.org/drawingml/2006/main"/>
           <a:p xmlns:a="http://schemas.openxmlformats.org/drawingml/2006/main">
             <a:pPr algn="l">
-              <a:buNone/>
-            </a:pPr>
-            <a:r>
-              <a:rPr sz="1575" b="0">
+              <a:lnSpc>
+                <a:spcPct val="108000"/>
+              </a:lnSpc>
+              <a:buNone/>
+              <a:defRPr sz="1350" b="0"/>
+            </a:pPr>
+            <a:r>
+              <a:rPr sz="1350" b="0">
                 <a:solidFill>
                   <a:srgbClr val="000000"/>
                 </a:solidFill>
@@ -11096,10 +11285,14 @@
           <a:lstStyle xmlns:a="http://schemas.openxmlformats.org/drawingml/2006/main"/>
           <a:p xmlns:a="http://schemas.openxmlformats.org/drawingml/2006/main">
             <a:pPr algn="l">
-              <a:buNone/>
-            </a:pPr>
-            <a:r>
-              <a:rPr sz="1575" b="1">
+              <a:lnSpc>
+                <a:spcPct val="108000"/>
+              </a:lnSpc>
+              <a:buNone/>
+              <a:defRPr sz="1350" b="0"/>
+            </a:pPr>
+            <a:r>
+              <a:rPr sz="1350" b="0">
                 <a:solidFill>
                   <a:srgbClr val="3D8DFF"/>
                 </a:solidFill>
@@ -11143,10 +11336,14 @@
           <a:lstStyle xmlns:a="http://schemas.openxmlformats.org/drawingml/2006/main"/>
           <a:p xmlns:a="http://schemas.openxmlformats.org/drawingml/2006/main">
             <a:pPr algn="l">
-              <a:buNone/>
-            </a:pPr>
-            <a:r>
-              <a:rPr sz="1575" b="0">
+              <a:lnSpc>
+                <a:spcPct val="108000"/>
+              </a:lnSpc>
+              <a:buNone/>
+              <a:defRPr sz="1350" b="0"/>
+            </a:pPr>
+            <a:r>
+              <a:rPr sz="1350" b="0">
                 <a:solidFill>
                   <a:srgbClr val="000000"/>
                 </a:solidFill>
@@ -11339,10 +11536,14 @@
           <a:lstStyle xmlns:a="http://schemas.openxmlformats.org/drawingml/2006/main"/>
           <a:p xmlns:a="http://schemas.openxmlformats.org/drawingml/2006/main">
             <a:pPr algn="l">
-              <a:buNone/>
-            </a:pPr>
-            <a:r>
-              <a:rPr sz="2250" b="1">
+              <a:lnSpc>
+                <a:spcPct val="108000"/>
+              </a:lnSpc>
+              <a:buNone/>
+              <a:defRPr sz="1725" b="1"/>
+            </a:pPr>
+            <a:r>
+              <a:rPr sz="1725" b="1">
                 <a:solidFill>
                   <a:srgbClr val="000000"/>
                 </a:solidFill>
@@ -11386,10 +11587,14 @@
           <a:lstStyle xmlns:a="http://schemas.openxmlformats.org/drawingml/2006/main"/>
           <a:p xmlns:a="http://schemas.openxmlformats.org/drawingml/2006/main">
             <a:pPr algn="l">
-              <a:buNone/>
-            </a:pPr>
-            <a:r>
-              <a:rPr sz="1575" b="1">
+              <a:lnSpc>
+                <a:spcPct val="108000"/>
+              </a:lnSpc>
+              <a:buNone/>
+              <a:defRPr sz="1350" b="0"/>
+            </a:pPr>
+            <a:r>
+              <a:rPr sz="1350" b="0">
                 <a:solidFill>
                   <a:srgbClr val="3D8DFF"/>
                 </a:solidFill>
@@ -11433,10 +11638,14 @@
           <a:lstStyle xmlns:a="http://schemas.openxmlformats.org/drawingml/2006/main"/>
           <a:p xmlns:a="http://schemas.openxmlformats.org/drawingml/2006/main">
             <a:pPr algn="l">
-              <a:buNone/>
-            </a:pPr>
-            <a:r>
-              <a:rPr sz="1575" b="0">
+              <a:lnSpc>
+                <a:spcPct val="108000"/>
+              </a:lnSpc>
+              <a:buNone/>
+              <a:defRPr sz="1350" b="0"/>
+            </a:pPr>
+            <a:r>
+              <a:rPr sz="1350" b="0">
                 <a:solidFill>
                   <a:srgbClr val="000000"/>
                 </a:solidFill>
@@ -11480,10 +11689,14 @@
           <a:lstStyle xmlns:a="http://schemas.openxmlformats.org/drawingml/2006/main"/>
           <a:p xmlns:a="http://schemas.openxmlformats.org/drawingml/2006/main">
             <a:pPr algn="l">
-              <a:buNone/>
-            </a:pPr>
-            <a:r>
-              <a:rPr sz="1575" b="1">
+              <a:lnSpc>
+                <a:spcPct val="108000"/>
+              </a:lnSpc>
+              <a:buNone/>
+              <a:defRPr sz="1350" b="0"/>
+            </a:pPr>
+            <a:r>
+              <a:rPr sz="1350" b="0">
                 <a:solidFill>
                   <a:srgbClr val="3D8DFF"/>
                 </a:solidFill>
@@ -11527,10 +11740,14 @@
           <a:lstStyle xmlns:a="http://schemas.openxmlformats.org/drawingml/2006/main"/>
           <a:p xmlns:a="http://schemas.openxmlformats.org/drawingml/2006/main">
             <a:pPr algn="l">
-              <a:buNone/>
-            </a:pPr>
-            <a:r>
-              <a:rPr sz="1575" b="0">
+              <a:lnSpc>
+                <a:spcPct val="108000"/>
+              </a:lnSpc>
+              <a:buNone/>
+              <a:defRPr sz="1350" b="0"/>
+            </a:pPr>
+            <a:r>
+              <a:rPr sz="1350" b="0">
                 <a:solidFill>
                   <a:srgbClr val="000000"/>
                 </a:solidFill>
@@ -11574,10 +11791,14 @@
           <a:lstStyle xmlns:a="http://schemas.openxmlformats.org/drawingml/2006/main"/>
           <a:p xmlns:a="http://schemas.openxmlformats.org/drawingml/2006/main">
             <a:pPr algn="l">
-              <a:buNone/>
-            </a:pPr>
-            <a:r>
-              <a:rPr sz="1575" b="1">
+              <a:lnSpc>
+                <a:spcPct val="108000"/>
+              </a:lnSpc>
+              <a:buNone/>
+              <a:defRPr sz="1350" b="0"/>
+            </a:pPr>
+            <a:r>
+              <a:rPr sz="1350" b="0">
                 <a:solidFill>
                   <a:srgbClr val="3D8DFF"/>
                 </a:solidFill>
@@ -11621,10 +11842,14 @@
           <a:lstStyle xmlns:a="http://schemas.openxmlformats.org/drawingml/2006/main"/>
           <a:p xmlns:a="http://schemas.openxmlformats.org/drawingml/2006/main">
             <a:pPr algn="l">
-              <a:buNone/>
-            </a:pPr>
-            <a:r>
-              <a:rPr sz="1575" b="0">
+              <a:lnSpc>
+                <a:spcPct val="108000"/>
+              </a:lnSpc>
+              <a:buNone/>
+              <a:defRPr sz="1350" b="0"/>
+            </a:pPr>
+            <a:r>
+              <a:rPr sz="1350" b="0">
                 <a:solidFill>
                   <a:srgbClr val="000000"/>
                 </a:solidFill>
@@ -11831,10 +12056,14 @@
           <a:lstStyle xmlns:a="http://schemas.openxmlformats.org/drawingml/2006/main"/>
           <a:p xmlns:a="http://schemas.openxmlformats.org/drawingml/2006/main">
             <a:pPr algn="l">
-              <a:buNone/>
-            </a:pPr>
-            <a:r>
-              <a:rPr sz="1125" b="1">
+              <a:lnSpc>
+                <a:spcPct val="106000"/>
+              </a:lnSpc>
+              <a:buNone/>
+              <a:defRPr sz="1050" b="1"/>
+            </a:pPr>
+            <a:r>
+              <a:rPr sz="1050" b="1">
                 <a:solidFill>
                   <a:srgbClr val="60646C"/>
                 </a:solidFill>
@@ -11842,7 +12071,7 @@
                 <a:ea typeface="Calibri"/>
                 <a:cs typeface="Calibri"/>
               </a:rPr>
-              <a:t>PHASE 05.5 REGISTRY</a:t>
+              <a:t>PHASE 05 · PART B</a:t>
             </a:r>
           </a:p>
         </p:txBody>
@@ -12488,10 +12717,14 @@
           <a:lstStyle xmlns:a="http://schemas.openxmlformats.org/drawingml/2006/main"/>
           <a:p xmlns:a="http://schemas.openxmlformats.org/drawingml/2006/main">
             <a:pPr algn="l">
-              <a:buNone/>
-            </a:pPr>
-            <a:r>
-              <a:rPr sz="1125" b="1">
+              <a:lnSpc>
+                <a:spcPct val="106000"/>
+              </a:lnSpc>
+              <a:buNone/>
+              <a:defRPr sz="1050" b="1"/>
+            </a:pPr>
+            <a:r>
+              <a:rPr sz="1050" b="1">
                 <a:solidFill>
                   <a:srgbClr val="60646C"/>
                 </a:solidFill>
@@ -12499,7 +12732,7 @@
                 <a:ea typeface="Calibri"/>
                 <a:cs typeface="Calibri"/>
               </a:rPr>
-              <a:t>PHASE 05.5 REGISTRY</a:t>
+              <a:t>PHASE 05 · PART B</a:t>
             </a:r>
           </a:p>
         </p:txBody>
@@ -12535,10 +12768,14 @@
           <a:lstStyle xmlns:a="http://schemas.openxmlformats.org/drawingml/2006/main"/>
           <a:p xmlns:a="http://schemas.openxmlformats.org/drawingml/2006/main">
             <a:pPr algn="l">
-              <a:buNone/>
-            </a:pPr>
-            <a:r>
-              <a:rPr sz="3750" b="1">
+              <a:lnSpc>
+                <a:spcPct val="98000"/>
+              </a:lnSpc>
+              <a:buNone/>
+              <a:defRPr sz="3525" b="1"/>
+            </a:pPr>
+            <a:r>
+              <a:rPr sz="3525" b="1">
                 <a:solidFill>
                   <a:srgbClr val="000000"/>
                 </a:solidFill>
@@ -12567,7 +12804,7 @@
         </p:nvSpPr>
         <p:spPr>
           <a:xfrm xmlns:a="http://schemas.openxmlformats.org/drawingml/2006/main">
-            <a:off x="-76200" y="3314700"/>
+            <a:off x="114300" y="3314700"/>
             <a:ext cx="1981200" cy="1504950"/>
           </a:xfrm>
           <a:prstGeom xmlns:a="http://schemas.openxmlformats.org/drawingml/2006/main" prst="rect">
@@ -12622,7 +12859,7 @@
         </p:nvSpPr>
         <p:spPr>
           <a:xfrm xmlns:a="http://schemas.openxmlformats.org/drawingml/2006/main">
-            <a:off x="19050" y="3694700"/>
+            <a:off x="209550" y="3694700"/>
             <a:ext cx="1790700" cy="400050"/>
           </a:xfrm>
           <a:prstGeom xmlns:a="http://schemas.openxmlformats.org/drawingml/2006/main" prst="rect">
@@ -12637,10 +12874,14 @@
           <a:lstStyle xmlns:a="http://schemas.openxmlformats.org/drawingml/2006/main"/>
           <a:p xmlns:a="http://schemas.openxmlformats.org/drawingml/2006/main">
             <a:pPr algn="ctr">
-              <a:buNone/>
-            </a:pPr>
-            <a:r>
-              <a:rPr sz="2000" b="1">
+              <a:lnSpc>
+                <a:spcPct val="108000"/>
+              </a:lnSpc>
+              <a:buNone/>
+              <a:defRPr sz="1725" b="1"/>
+            </a:pPr>
+            <a:r>
+              <a:rPr sz="1725" b="1">
                 <a:solidFill>
                   <a:srgbClr val="000000"/>
                 </a:solidFill>
@@ -12669,7 +12910,7 @@
         </p:nvSpPr>
         <p:spPr>
           <a:xfrm xmlns:a="http://schemas.openxmlformats.org/drawingml/2006/main">
-            <a:off x="19050" y="4114800"/>
+            <a:off x="209550" y="4114800"/>
             <a:ext cx="1790700" cy="500000"/>
           </a:xfrm>
           <a:prstGeom xmlns:a="http://schemas.openxmlformats.org/drawingml/2006/main" prst="rect">
@@ -12684,7 +12925,11 @@
           <a:lstStyle xmlns:a="http://schemas.openxmlformats.org/drawingml/2006/main"/>
           <a:p xmlns:a="http://schemas.openxmlformats.org/drawingml/2006/main">
             <a:pPr algn="ctr">
-              <a:buNone/>
+              <a:lnSpc>
+                <a:spcPct val="108000"/>
+              </a:lnSpc>
+              <a:buNone/>
+              <a:defRPr sz="1350" b="0"/>
             </a:pPr>
             <a:r>
               <a:rPr sz="1350" b="0">
@@ -12841,10 +13086,14 @@
           <a:lstStyle xmlns:a="http://schemas.openxmlformats.org/drawingml/2006/main"/>
           <a:p xmlns:a="http://schemas.openxmlformats.org/drawingml/2006/main">
             <a:pPr algn="ctr">
-              <a:buNone/>
-            </a:pPr>
-            <a:r>
-              <a:rPr sz="2000" b="1">
+              <a:lnSpc>
+                <a:spcPct val="108000"/>
+              </a:lnSpc>
+              <a:buNone/>
+              <a:defRPr sz="1725" b="1"/>
+            </a:pPr>
+            <a:r>
+              <a:rPr sz="1725" b="1">
                 <a:solidFill>
                   <a:srgbClr val="000000"/>
                 </a:solidFill>
@@ -12888,7 +13137,11 @@
           <a:lstStyle xmlns:a="http://schemas.openxmlformats.org/drawingml/2006/main"/>
           <a:p xmlns:a="http://schemas.openxmlformats.org/drawingml/2006/main">
             <a:pPr algn="ctr">
-              <a:buNone/>
+              <a:lnSpc>
+                <a:spcPct val="108000"/>
+              </a:lnSpc>
+              <a:buNone/>
+              <a:defRPr sz="1350" b="0"/>
             </a:pPr>
             <a:r>
               <a:rPr sz="1350" b="0">
@@ -13045,10 +13298,14 @@
           <a:lstStyle xmlns:a="http://schemas.openxmlformats.org/drawingml/2006/main"/>
           <a:p xmlns:a="http://schemas.openxmlformats.org/drawingml/2006/main">
             <a:pPr algn="ctr">
-              <a:buNone/>
-            </a:pPr>
-            <a:r>
-              <a:rPr sz="2000" b="1">
+              <a:lnSpc>
+                <a:spcPct val="108000"/>
+              </a:lnSpc>
+              <a:buNone/>
+              <a:defRPr sz="1725" b="1"/>
+            </a:pPr>
+            <a:r>
+              <a:rPr sz="1725" b="1">
                 <a:solidFill>
                   <a:srgbClr val="000000"/>
                 </a:solidFill>
@@ -13092,7 +13349,11 @@
           <a:lstStyle xmlns:a="http://schemas.openxmlformats.org/drawingml/2006/main"/>
           <a:p xmlns:a="http://schemas.openxmlformats.org/drawingml/2006/main">
             <a:pPr algn="ctr">
-              <a:buNone/>
+              <a:lnSpc>
+                <a:spcPct val="108000"/>
+              </a:lnSpc>
+              <a:buNone/>
+              <a:defRPr sz="1350" b="0"/>
             </a:pPr>
             <a:r>
               <a:rPr sz="1350" b="0">
@@ -13249,10 +13510,14 @@
           <a:lstStyle xmlns:a="http://schemas.openxmlformats.org/drawingml/2006/main"/>
           <a:p xmlns:a="http://schemas.openxmlformats.org/drawingml/2006/main">
             <a:pPr algn="ctr">
-              <a:buNone/>
-            </a:pPr>
-            <a:r>
-              <a:rPr sz="2000" b="1">
+              <a:lnSpc>
+                <a:spcPct val="108000"/>
+              </a:lnSpc>
+              <a:buNone/>
+              <a:defRPr sz="1725" b="1"/>
+            </a:pPr>
+            <a:r>
+              <a:rPr sz="1725" b="1">
                 <a:solidFill>
                   <a:srgbClr val="000000"/>
                 </a:solidFill>
@@ -13296,7 +13561,11 @@
           <a:lstStyle xmlns:a="http://schemas.openxmlformats.org/drawingml/2006/main"/>
           <a:p xmlns:a="http://schemas.openxmlformats.org/drawingml/2006/main">
             <a:pPr algn="ctr">
-              <a:buNone/>
+              <a:lnSpc>
+                <a:spcPct val="108000"/>
+              </a:lnSpc>
+              <a:buNone/>
+              <a:defRPr sz="1350" b="0"/>
             </a:pPr>
             <a:r>
               <a:rPr sz="1350" b="0">
@@ -13383,7 +13652,7 @@
         </p:nvSpPr>
         <p:spPr>
           <a:xfrm xmlns:a="http://schemas.openxmlformats.org/drawingml/2006/main">
-            <a:off x="10287000" y="3314700"/>
+            <a:off x="10096500" y="3314700"/>
             <a:ext cx="1981200" cy="1504950"/>
           </a:xfrm>
           <a:prstGeom xmlns:a="http://schemas.openxmlformats.org/drawingml/2006/main" prst="rect">
@@ -13438,7 +13707,7 @@
         </p:nvSpPr>
         <p:spPr>
           <a:xfrm xmlns:a="http://schemas.openxmlformats.org/drawingml/2006/main">
-            <a:off x="10382250" y="3694700"/>
+            <a:off x="10191750" y="3694700"/>
             <a:ext cx="1790700" cy="400050"/>
           </a:xfrm>
           <a:prstGeom xmlns:a="http://schemas.openxmlformats.org/drawingml/2006/main" prst="rect">
@@ -13453,10 +13722,14 @@
           <a:lstStyle xmlns:a="http://schemas.openxmlformats.org/drawingml/2006/main"/>
           <a:p xmlns:a="http://schemas.openxmlformats.org/drawingml/2006/main">
             <a:pPr algn="ctr">
-              <a:buNone/>
-            </a:pPr>
-            <a:r>
-              <a:rPr sz="2000" b="1">
+              <a:lnSpc>
+                <a:spcPct val="108000"/>
+              </a:lnSpc>
+              <a:buNone/>
+              <a:defRPr sz="1725" b="1"/>
+            </a:pPr>
+            <a:r>
+              <a:rPr sz="1725" b="1">
                 <a:solidFill>
                   <a:srgbClr val="000000"/>
                 </a:solidFill>
@@ -13485,7 +13758,7 @@
         </p:nvSpPr>
         <p:spPr>
           <a:xfrm xmlns:a="http://schemas.openxmlformats.org/drawingml/2006/main">
-            <a:off x="10382250" y="4114800"/>
+            <a:off x="10191750" y="4114800"/>
             <a:ext cx="1790700" cy="500000"/>
           </a:xfrm>
           <a:prstGeom xmlns:a="http://schemas.openxmlformats.org/drawingml/2006/main" prst="rect">
@@ -13500,7 +13773,11 @@
           <a:lstStyle xmlns:a="http://schemas.openxmlformats.org/drawingml/2006/main"/>
           <a:p xmlns:a="http://schemas.openxmlformats.org/drawingml/2006/main">
             <a:pPr algn="ctr">
-              <a:buNone/>
+              <a:lnSpc>
+                <a:spcPct val="108000"/>
+              </a:lnSpc>
+              <a:buNone/>
+              <a:defRPr sz="1350" b="0"/>
             </a:pPr>
             <a:r>
               <a:rPr sz="1350" b="0">
@@ -13532,8 +13809,8 @@
         </p:nvSpPr>
         <p:spPr>
           <a:xfrm xmlns:a="http://schemas.openxmlformats.org/drawingml/2006/main">
-            <a:off x="1676400" y="5181600"/>
-            <a:ext cx="8839200" cy="600075"/>
+            <a:off x="1676400" y="5448300"/>
+            <a:ext cx="8839200" cy="457200"/>
           </a:xfrm>
           <a:prstGeom xmlns:a="http://schemas.openxmlformats.org/drawingml/2006/main" prst="rect">
             <a:avLst/>
@@ -13547,10 +13824,14 @@
           <a:lstStyle xmlns:a="http://schemas.openxmlformats.org/drawingml/2006/main"/>
           <a:p xmlns:a="http://schemas.openxmlformats.org/drawingml/2006/main">
             <a:pPr algn="ctr">
-              <a:buNone/>
-            </a:pPr>
-            <a:r>
-              <a:rPr sz="2100" b="1">
+              <a:lnSpc>
+                <a:spcPct val="105000"/>
+              </a:lnSpc>
+              <a:buNone/>
+              <a:defRPr sz="1500"/>
+            </a:pPr>
+            <a:r>
+              <a:rPr sz="1500" b="1">
                 <a:solidFill>
                   <a:srgbClr val="000000"/>
                 </a:solidFill>
@@ -13663,10 +13944,14 @@
           <a:lstStyle xmlns:a="http://schemas.openxmlformats.org/drawingml/2006/main"/>
           <a:p xmlns:a="http://schemas.openxmlformats.org/drawingml/2006/main">
             <a:pPr algn="l">
-              <a:buNone/>
-            </a:pPr>
-            <a:r>
-              <a:rPr sz="1125" b="1">
+              <a:lnSpc>
+                <a:spcPct val="106000"/>
+              </a:lnSpc>
+              <a:buNone/>
+              <a:defRPr sz="1050" b="1"/>
+            </a:pPr>
+            <a:r>
+              <a:rPr sz="1050" b="1">
                 <a:solidFill>
                   <a:srgbClr val="60646C"/>
                 </a:solidFill>
@@ -13674,7 +13959,7 @@
                 <a:ea typeface="Calibri"/>
                 <a:cs typeface="Calibri"/>
               </a:rPr>
-              <a:t>PHASE 05.5 REGISTRY</a:t>
+              <a:t>PHASE 05 · PART B</a:t>
             </a:r>
           </a:p>
         </p:txBody>
